--- a/ucheba/pravovedenie-grk/Ст. 40 ГрК РФ — презентация.pptx
+++ b/ucheba/pravovedenie-grk/Ст. 40 ГрК РФ — презентация.pptx
@@ -601,7 +601,7 @@
           <a:p>
             <a:r>
               <a:rPr lang="en-US" dirty="0"/>
-              <a:t>Первый кейс — позиция Высшего Арбитражного Суда 2014 года. Ситуация: слушания и рекомендации были в пользу заявителя, а глава администрации отказал. ВАС указал, что заключение по итогам слушаний — рекомендательное, и глава вправе с ним не согласиться, но обязан указать причины. Это совпадает с позицией Конституционного Суда в определении № 931-О-О, где оспаривались в том числе части 3, 5 и 6 статьи 40. Вывод: решение фактически принимает одно лицо, а защитой служит только мотивировка.</a:t>
+              <a:t>Первый кейс — определение Конституционного Суда 2010 года. Жительница Петербурга после проигрыша в районном суде оспорила сами нормы Градостроительного кодекса о публичных слушаниях, в том числе части 3, 5 и 6 статьи 40 — заявление, рекомендации комиссии и решение главы администрации. Конституционный Суд жалобу к рассмотрению не принял и сформулировал важную позицию: публичные слушания — не форма народовластия, а способ выявить мнение жителей, их итоги носят рекомендательный характер. Для статьи 40 это значит: глава администрации может не согласиться с итогами слушаний, но обязан указать причины. Единственный предохранитель — мотивировка, которую затем проверяет суд.</a:t>
             </a:r>
             <a:endParaRPr lang="en-US" dirty="0"/>
           </a:p>
@@ -2956,7 +2956,7 @@
                 <a:ea typeface="Cambria" pitchFamily="34" charset="-122"/>
                 <a:cs typeface="Cambria" pitchFamily="34" charset="-120"/>
               </a:rPr>
-              <a:t>Определение ВАС РФ от 11.03.2014 № ВАС-2000/14</a:t>
+              <a:t>Определение КС РФ от 15.07.2010 № 931-О-О</a:t>
             </a:r>
             <a:endParaRPr lang="en-US" sz="3000" dirty="0"/>
           </a:p>
@@ -3073,7 +3073,7 @@
                 <a:ea typeface="Calibri" pitchFamily="34" charset="-122"/>
                 <a:cs typeface="Calibri" pitchFamily="34" charset="-120"/>
               </a:rPr>
-              <a:t>Высший Арбитражный Суд РФ ответил на вопрос: обязан ли глава администрации следовать итогам публичных слушаний</a:t>
+              <a:t>Гражданка О. О. Андронова оспорила нормы ГрК РФ о публичных слушаниях — в том числе ч. 3, 5 и 6 ст. 40 — и законы Санкт-Петербурга о порядке их проведения</a:t>
             </a:r>
             <a:endParaRPr lang="en-US" sz="1600" dirty="0"/>
           </a:p>
@@ -3166,7 +3166,7 @@
                 <a:ea typeface="Calibri" pitchFamily="34" charset="-122"/>
                 <a:cs typeface="Calibri" pitchFamily="34" charset="-120"/>
               </a:rPr>
-              <a:t>СИТУАЦИЯ</a:t>
+              <a:t>ФАБУЛА</a:t>
             </a:r>
             <a:endParaRPr lang="en-US" sz="1300" dirty="0"/>
           </a:p>
@@ -3205,7 +3205,7 @@
                 <a:ea typeface="Calibri" pitchFamily="34" charset="-122"/>
                 <a:cs typeface="Calibri" pitchFamily="34" charset="-120"/>
               </a:rPr>
-              <a:t>Итоги публичных слушаний и рекомендации были в пользу заявителя, но глава администрации в разрешении на отклонение отказал</a:t>
+              <a:t>Красногвардейский районный суд Санкт-Петербурга отказал заявительнице в требованиях к администрации района (2009). Она сочла, что ч. 3, 5, 6 ст. 40 и ч. 3–9 ст. 39 ГрК противоречат Конституции, в том числе её статьям 3 и 130</a:t>
             </a:r>
             <a:endParaRPr lang="en-US" sz="1600" dirty="0"/>
           </a:p>
@@ -3337,7 +3337,7 @@
                 <a:ea typeface="Calibri" pitchFamily="34" charset="-122"/>
                 <a:cs typeface="Calibri" pitchFamily="34" charset="-120"/>
               </a:rPr>
-              <a:t>Заключение по итогам слушаний носит рекомендательный характер. Глава вправе не согласиться с рекомендациями и отказать — но обязан указать причины (ч. 6 ст. 40)</a:t>
+              <a:t>Публичные слушания не являются формой осуществления власти населением: это способ выявить мнение жителей. Их итоги учитываются, но носят рекомендательный характер</a:t>
             </a:r>
             <a:endParaRPr lang="en-US" sz="1600" dirty="0"/>
           </a:p>
@@ -3469,7 +3469,7 @@
                 <a:ea typeface="Calibri" pitchFamily="34" charset="-122"/>
                 <a:cs typeface="Calibri" pitchFamily="34" charset="-120"/>
               </a:rPr>
-              <a:t>Последнее слово — за одним должностным лицом. Единственный «предохранитель» — обязанность мотивировать отказ, которую затем проверяет суд</a:t>
+              <a:t>Глава администрации вправе решить иначе, чем рекомендовали по итогам слушаний, но ч. 6 ст. 40 обязывает его указать причины. Мотивировку затем проверяет суд</a:t>
             </a:r>
             <a:endParaRPr lang="en-US" sz="1600" dirty="0"/>
           </a:p>
@@ -5751,7 +5751,7 @@
                 <a:ea typeface="Calibri" pitchFamily="34" charset="-122"/>
                 <a:cs typeface="Calibri" pitchFamily="34" charset="-120"/>
               </a:rPr>
-              <a:t>Позиция Высшего Арбитражного Суда РФ и дело ЖК «Турист-2» в Липецке</a:t>
+              <a:t>Позиция Конституционного Суда РФ и дело ЖК «Турист-2» в Липецке</a:t>
             </a:r>
             <a:endParaRPr lang="en-US" sz="1500" dirty="0"/>
           </a:p>
